--- a/documentos-modulo1/Presentacion_Modulo1_Evolti.pptx
+++ b/documentos-modulo1/Presentacion_Modulo1_Evolti.pptx
@@ -3447,7 +3447,7 @@
                 </a:solidFill>
                 <a:latin typeface="Calibri"/>
               </a:rPr>
-              <a:t>Presentado por: [Tu nombre]   |   Rol: Consultora de abastecimiento</a:t>
+              <a:t>Presentado por: Laura Sofía Salas Rosero   |   Rol: Consultora de abastecimiento</a:t>
             </a:r>
           </a:p>
         </p:txBody>
